--- a/docs/go-to-market/02_Brand_Pitch_Deck/FluxMuse_Pitch_Solo_Entrepreneurs.pptx
+++ b/docs/go-to-market/02_Brand_Pitch_Deck/FluxMuse_Pitch_Solo_Entrepreneurs.pptx
@@ -585,7 +585,7 @@
           <a:lstStyle/>
           <a:p>
             <a:r>
-              <a:t>Here's the easiest yes. Join as a Founding Member and your first two Nano bills are R104 instead of R149, or R202 instead of R289 on Micro. After that it's the normal monthly price. It's a discount on a paid plan, not a free period, and it's for South African sign-ups while it lasts; there's no closing date to quote. Don't promise extra perks like badges or bonus months; only the discount is confirmed. Then offer the demo on their own products (00_FACTS §2 "Founding Member").</a:t>
+              <a:t>Here's the easiest yes. Join as a Founding Member and your first two Nano bills are R104 instead of R149, or R202 instead of R289 on Micro. After that it's the normal monthly price. It's a discount on a paid plan, not a free period, and it's open until 31 December 2026. Don't promise extra perks like badges or bonus months; only the discount is confirmed. Then offer the demo on their own products (CURRENT_OFFER.md §1).</a:t>
             </a:r>
           </a:p>
         </p:txBody>
@@ -1145,7 +1145,7 @@
           <a:lstStyle/>
           <a:p>
             <a:r>
-              <a:t>This is the heart of the pitch. A buyer finds you through a Status post, a QR code or your shop link. The assistant replies in their language. They browse a catalogue built from your photos, fill a cart, and the order lands on your WhatsApp; you reply SOLD to keep track. Be honest about payment: checkout through FluxMuse on Paystack is built but being switched on, because it hasn't been tested end to end with real money. Until then, orders arrive as a WhatsApp message and you take payment your usual way (CURRENT_OFFER.md §3). Broadcasts go only to consented contacts.</a:t>
+              <a:t>This is the heart of the pitch. A buyer finds you through a Status post, a QR code or your shop link. The assistant replies in their language. They browse a catalogue built from your photos, fill a cart, and the order lands on your WhatsApp; you reply SOLD to keep track. Be honest about payment: checkout through FluxMuse, via our payment partners, is built but being switched on, because it hasn't been tested with real money. Until then, orders arrive as a WhatsApp message and you take payment your usual way (CURRENT_OFFER.md §3). Broadcasts go only to consented contacts.</a:t>
             </a:r>
           </a:p>
         </p:txBody>
@@ -1425,7 +1425,7 @@
           <a:lstStyle/>
           <a:p>
             <a:r>
-              <a:t>Most solo businesses start on Nano: R149 a month for one brand and three channels. Micro at R289 adds a fourth channel and connects their own WhatsApp number. Starter at R499 is the step up as they grow. Annual billing is ten times monthly. There's no trial: every paid plan starts with payment. As a Founding Member, a South African sign-up pays 30% less for the first two monthly bills: R104 on Nano, R202 on Micro. It's a discount, not a free period, and it has no set end date. Don't quote AI credit numbers (CURRENT_OFFER.md §1).</a:t>
+              <a:t>Most solo businesses start on Nano: R149 a month for one brand and three channels. Micro at R289 adds a fourth channel and connects their own WhatsApp number. Starter at R499 is the step up as they grow. Annual billing is ten times monthly. There's no trial: every paid plan starts with payment. As a Founding Member, they pay 30% less for the first two monthly bills: R104 on Nano, R202 on Micro. It's a discount, not a free period, open until 31 December 2026. Don't quote AI credit numbers (CURRENT_OFFER.md §1).</a:t>
             </a:r>
           </a:p>
         </p:txBody>
@@ -4441,7 +4441,7 @@
       <p:grpSpPr/>
       <p:pic>
         <p:nvPicPr>
-          <p:cNvPr id="2" name="g96|img|brand/fluxmuse-logo-dark.png" descr="FluxMuse logo"/>
+          <p:cNvPr id="2" name="g100|img|brand/fluxmuse-logo-dark.png" descr="FluxMuse logo"/>
           <p:cNvPicPr>
             <a:picLocks noChangeAspect="1"/>
           </p:cNvPicPr>
@@ -4466,7 +4466,7 @@
       </p:pic>
       <p:sp>
         <p:nvSpPr>
-          <p:cNvPr id="3" name="g97|deco|"/>
+          <p:cNvPr id="3" name="g101|deco|"/>
           <p:cNvSpPr/>
           <p:nvPr/>
         </p:nvSpPr>
@@ -4510,7 +4510,7 @@
       </p:sp>
       <p:pic>
         <p:nvPicPr>
-          <p:cNvPr id="4" name="g97|img|brand/fluxmuse-icon-512.png" descr="FluxMuse Muse icon"/>
+          <p:cNvPr id="4" name="g101|img|brand/fluxmuse-icon-512.png" descr="FluxMuse Muse icon"/>
           <p:cNvPicPr>
             <a:picLocks noChangeAspect="1"/>
           </p:cNvPicPr>
@@ -4535,7 +4535,7 @@
       </p:pic>
       <p:sp>
         <p:nvSpPr>
-          <p:cNvPr id="5" name="g98|eyebrow|"/>
+          <p:cNvPr id="5" name="g102|eyebrow|"/>
           <p:cNvSpPr txBox="1"/>
           <p:nvPr/>
         </p:nvSpPr>
@@ -4570,7 +4570,7 @@
       </p:sp>
       <p:sp>
         <p:nvSpPr>
-          <p:cNvPr id="6" name="g99|title|"/>
+          <p:cNvPr id="6" name="g103|title|"/>
           <p:cNvSpPr txBox="1"/>
           <p:nvPr/>
         </p:nvSpPr>
@@ -4625,7 +4625,7 @@
       </p:sp>
       <p:sp>
         <p:nvSpPr>
-          <p:cNvPr id="7" name="g100|body|"/>
+          <p:cNvPr id="7" name="g104|body|"/>
           <p:cNvSpPr txBox="1"/>
           <p:nvPr/>
         </p:nvSpPr>
@@ -4660,7 +4660,7 @@
       </p:sp>
       <p:sp>
         <p:nvSpPr>
-          <p:cNvPr id="8" name="g101|placeholder|"/>
+          <p:cNvPr id="8" name="g105|placeholder|"/>
           <p:cNvSpPr txBox="1"/>
           <p:nvPr/>
         </p:nvSpPr>
@@ -4704,7 +4704,7 @@
       </p:sp>
       <p:sp>
         <p:nvSpPr>
-          <p:cNvPr id="9" name="g101|placeholder|"/>
+          <p:cNvPr id="9" name="g105|placeholder|"/>
           <p:cNvSpPr txBox="1"/>
           <p:nvPr/>
         </p:nvSpPr>
@@ -4765,7 +4765,7 @@
       <p:grpSpPr/>
       <p:sp>
         <p:nvSpPr>
-          <p:cNvPr id="2" name="hdr137|eyebrow|"/>
+          <p:cNvPr id="2" name="hdr141|eyebrow|"/>
           <p:cNvSpPr txBox="1"/>
           <p:nvPr/>
         </p:nvSpPr>
@@ -4793,14 +4793,14 @@
                 </a:solidFill>
                 <a:latin typeface="Inter"/>
               </a:rPr>
-              <a:t>LAUNCH OFFER · SOUTH AFRICA · LIVE NOW</a:t>
-            </a:r>
-          </a:p>
-        </p:txBody>
-      </p:sp>
-      <p:sp>
-        <p:nvSpPr>
-          <p:cNvPr id="3" name="hdr137|title|"/>
+              <a:t>LAUNCH OFFER · LIVE UNTIL 31 DEC 2026</a:t>
+            </a:r>
+          </a:p>
+        </p:txBody>
+      </p:sp>
+      <p:sp>
+        <p:nvSpPr>
+          <p:cNvPr id="3" name="hdr141|title|"/>
           <p:cNvSpPr txBox="1"/>
           <p:nvPr/>
         </p:nvSpPr>
@@ -4835,7 +4835,7 @@
       </p:sp>
       <p:pic>
         <p:nvPicPr>
-          <p:cNvPr id="4" name="g138|img|infographics/founding-member-offer.png" descr="Founding Member: 30% off your first two monthly bills, South African sign-ups, while it lasts: Nano R104, Micro R202, Starter R349, Growth R1,399, Scale R3,499; a discount, not a free period"/>
+          <p:cNvPr id="4" name="g142|img|infographics/founding-member-offer.png" descr="Founding Member: 30% off your first two monthly bills on every plan until 31 December 2026: Nano R104, Micro R202, Starter R349, Growth R1,399, Scale R3,499, Corporate R4,899, Agency R6,999; a discount, not a free period"/>
           <p:cNvPicPr>
             <a:picLocks noChangeAspect="1"/>
           </p:cNvPicPr>
@@ -4956,7 +4956,7 @@
       <p:grpSpPr/>
       <p:sp>
         <p:nvSpPr>
-          <p:cNvPr id="2" name="hdr139|eyebrow|"/>
+          <p:cNvPr id="2" name="hdr143|eyebrow|"/>
           <p:cNvSpPr txBox="1"/>
           <p:nvPr/>
         </p:nvSpPr>
@@ -4991,7 +4991,7 @@
       </p:sp>
       <p:sp>
         <p:nvSpPr>
-          <p:cNvPr id="3" name="hdr139|title|"/>
+          <p:cNvPr id="3" name="hdr143|title|"/>
           <p:cNvSpPr txBox="1"/>
           <p:nvPr/>
         </p:nvSpPr>
@@ -5026,7 +5026,7 @@
       </p:sp>
       <p:sp>
         <p:nvSpPr>
-          <p:cNvPr id="4" name="trust140|card|"/>
+          <p:cNvPr id="4" name="trust144|card|"/>
           <p:cNvSpPr/>
           <p:nvPr/>
         </p:nvSpPr>
@@ -5072,7 +5072,7 @@
       </p:sp>
       <p:sp>
         <p:nvSpPr>
-          <p:cNvPr id="5" name="trust140|deco|"/>
+          <p:cNvPr id="5" name="trust144|deco|"/>
           <p:cNvSpPr/>
           <p:nvPr/>
         </p:nvSpPr>
@@ -5116,7 +5116,7 @@
       </p:sp>
       <p:pic>
         <p:nvPicPr>
-          <p:cNvPr id="6" name="trust140|icon|checkCircle_deep.png" descr="checkCircle_deep"/>
+          <p:cNvPr id="6" name="trust144|icon|checkCircle_deep.png" descr="checkCircle_deep"/>
           <p:cNvPicPr>
             <a:picLocks noChangeAspect="1"/>
           </p:cNvPicPr>
@@ -5141,7 +5141,7 @@
       </p:pic>
       <p:sp>
         <p:nvSpPr>
-          <p:cNvPr id="7" name="trust140|card|"/>
+          <p:cNvPr id="7" name="trust144|card|"/>
           <p:cNvSpPr txBox="1"/>
           <p:nvPr/>
         </p:nvSpPr>
@@ -5176,7 +5176,7 @@
       </p:sp>
       <p:sp>
         <p:nvSpPr>
-          <p:cNvPr id="8" name="trust140|card|"/>
+          <p:cNvPr id="8" name="trust144|card|"/>
           <p:cNvSpPr txBox="1"/>
           <p:nvPr/>
         </p:nvSpPr>
@@ -5211,7 +5211,7 @@
       </p:sp>
       <p:sp>
         <p:nvSpPr>
-          <p:cNvPr id="9" name="trust141|card|"/>
+          <p:cNvPr id="9" name="trust145|card|"/>
           <p:cNvSpPr/>
           <p:nvPr/>
         </p:nvSpPr>
@@ -5257,7 +5257,7 @@
       </p:sp>
       <p:sp>
         <p:nvSpPr>
-          <p:cNvPr id="10" name="trust141|deco|"/>
+          <p:cNvPr id="10" name="trust145|deco|"/>
           <p:cNvSpPr/>
           <p:nvPr/>
         </p:nvSpPr>
@@ -5301,7 +5301,7 @@
       </p:sp>
       <p:pic>
         <p:nvPicPr>
-          <p:cNvPr id="11" name="trust141|icon|chat_deep.png" descr="chat_deep"/>
+          <p:cNvPr id="11" name="trust145|icon|chat_deep.png" descr="chat_deep"/>
           <p:cNvPicPr>
             <a:picLocks noChangeAspect="1"/>
           </p:cNvPicPr>
@@ -5326,7 +5326,7 @@
       </p:pic>
       <p:sp>
         <p:nvSpPr>
-          <p:cNvPr id="12" name="trust141|card|"/>
+          <p:cNvPr id="12" name="trust145|card|"/>
           <p:cNvSpPr txBox="1"/>
           <p:nvPr/>
         </p:nvSpPr>
@@ -5361,7 +5361,7 @@
       </p:sp>
       <p:sp>
         <p:nvSpPr>
-          <p:cNvPr id="13" name="trust141|card|"/>
+          <p:cNvPr id="13" name="trust145|card|"/>
           <p:cNvSpPr txBox="1"/>
           <p:nvPr/>
         </p:nvSpPr>
@@ -5396,7 +5396,7 @@
       </p:sp>
       <p:sp>
         <p:nvSpPr>
-          <p:cNvPr id="14" name="trust142|card|"/>
+          <p:cNvPr id="14" name="trust146|card|"/>
           <p:cNvSpPr/>
           <p:nvPr/>
         </p:nvSpPr>
@@ -5442,7 +5442,7 @@
       </p:sp>
       <p:sp>
         <p:nvSpPr>
-          <p:cNvPr id="15" name="trust142|deco|"/>
+          <p:cNvPr id="15" name="trust146|deco|"/>
           <p:cNvSpPr/>
           <p:nvPr/>
         </p:nvSpPr>
@@ -5486,7 +5486,7 @@
       </p:sp>
       <p:pic>
         <p:nvPicPr>
-          <p:cNvPr id="16" name="trust142|icon|shield_deep.png" descr="shield_deep"/>
+          <p:cNvPr id="16" name="trust146|icon|shield_deep.png" descr="shield_deep"/>
           <p:cNvPicPr>
             <a:picLocks noChangeAspect="1"/>
           </p:cNvPicPr>
@@ -5511,7 +5511,7 @@
       </p:pic>
       <p:sp>
         <p:nvSpPr>
-          <p:cNvPr id="17" name="trust142|card|"/>
+          <p:cNvPr id="17" name="trust146|card|"/>
           <p:cNvSpPr txBox="1"/>
           <p:nvPr/>
         </p:nvSpPr>
@@ -5546,7 +5546,7 @@
       </p:sp>
       <p:sp>
         <p:nvSpPr>
-          <p:cNvPr id="18" name="trust142|card|"/>
+          <p:cNvPr id="18" name="trust146|card|"/>
           <p:cNvSpPr txBox="1"/>
           <p:nvPr/>
         </p:nvSpPr>
@@ -5581,7 +5581,7 @@
       </p:sp>
       <p:sp>
         <p:nvSpPr>
-          <p:cNvPr id="19" name="trust143|card|"/>
+          <p:cNvPr id="19" name="trust147|card|"/>
           <p:cNvSpPr/>
           <p:nvPr/>
         </p:nvSpPr>
@@ -5627,7 +5627,7 @@
       </p:sp>
       <p:sp>
         <p:nvSpPr>
-          <p:cNvPr id="20" name="trust143|deco|"/>
+          <p:cNvPr id="20" name="trust147|deco|"/>
           <p:cNvSpPr/>
           <p:nvPr/>
         </p:nvSpPr>
@@ -5671,7 +5671,7 @@
       </p:sp>
       <p:pic>
         <p:nvPicPr>
-          <p:cNvPr id="21" name="trust143|icon|layers_deep.png" descr="layers_deep"/>
+          <p:cNvPr id="21" name="trust147|icon|layers_deep.png" descr="layers_deep"/>
           <p:cNvPicPr>
             <a:picLocks noChangeAspect="1"/>
           </p:cNvPicPr>
@@ -5696,7 +5696,7 @@
       </p:pic>
       <p:sp>
         <p:nvSpPr>
-          <p:cNvPr id="22" name="trust143|card|"/>
+          <p:cNvPr id="22" name="trust147|card|"/>
           <p:cNvSpPr txBox="1"/>
           <p:nvPr/>
         </p:nvSpPr>
@@ -5731,7 +5731,7 @@
       </p:sp>
       <p:sp>
         <p:nvSpPr>
-          <p:cNvPr id="23" name="trust143|card|"/>
+          <p:cNvPr id="23" name="trust147|card|"/>
           <p:cNvSpPr txBox="1"/>
           <p:nvPr/>
         </p:nvSpPr>
@@ -5766,7 +5766,7 @@
       </p:sp>
       <p:sp>
         <p:nvSpPr>
-          <p:cNvPr id="24" name="trust144|card|"/>
+          <p:cNvPr id="24" name="trust148|card|"/>
           <p:cNvSpPr/>
           <p:nvPr/>
         </p:nvSpPr>
@@ -5812,7 +5812,7 @@
       </p:sp>
       <p:sp>
         <p:nvSpPr>
-          <p:cNvPr id="25" name="trust144|deco|"/>
+          <p:cNvPr id="25" name="trust148|deco|"/>
           <p:cNvSpPr/>
           <p:nvPr/>
         </p:nvSpPr>
@@ -5856,7 +5856,7 @@
       </p:sp>
       <p:pic>
         <p:nvPicPr>
-          <p:cNvPr id="26" name="trust144|icon|plug_deep.png" descr="plug_deep"/>
+          <p:cNvPr id="26" name="trust148|icon|plug_deep.png" descr="plug_deep"/>
           <p:cNvPicPr>
             <a:picLocks noChangeAspect="1"/>
           </p:cNvPicPr>
@@ -5881,7 +5881,7 @@
       </p:pic>
       <p:sp>
         <p:nvSpPr>
-          <p:cNvPr id="27" name="trust144|card|"/>
+          <p:cNvPr id="27" name="trust148|card|"/>
           <p:cNvSpPr txBox="1"/>
           <p:nvPr/>
         </p:nvSpPr>
@@ -5916,7 +5916,7 @@
       </p:sp>
       <p:sp>
         <p:nvSpPr>
-          <p:cNvPr id="28" name="trust144|card|"/>
+          <p:cNvPr id="28" name="trust148|card|"/>
           <p:cNvSpPr txBox="1"/>
           <p:nvPr/>
         </p:nvSpPr>
@@ -5951,7 +5951,7 @@
       </p:sp>
       <p:sp>
         <p:nvSpPr>
-          <p:cNvPr id="29" name="trust145|card|"/>
+          <p:cNvPr id="29" name="trust149|card|"/>
           <p:cNvSpPr/>
           <p:nvPr/>
         </p:nvSpPr>
@@ -5997,7 +5997,7 @@
       </p:sp>
       <p:sp>
         <p:nvSpPr>
-          <p:cNvPr id="30" name="trust145|deco|"/>
+          <p:cNvPr id="30" name="trust149|deco|"/>
           <p:cNvSpPr/>
           <p:nvPr/>
         </p:nvSpPr>
@@ -6041,7 +6041,7 @@
       </p:sp>
       <p:pic>
         <p:nvPicPr>
-          <p:cNvPr id="31" name="trust145|icon|refresh_deep.png" descr="refresh_deep"/>
+          <p:cNvPr id="31" name="trust149|icon|refresh_deep.png" descr="refresh_deep"/>
           <p:cNvPicPr>
             <a:picLocks noChangeAspect="1"/>
           </p:cNvPicPr>
@@ -6066,7 +6066,7 @@
       </p:pic>
       <p:sp>
         <p:nvSpPr>
-          <p:cNvPr id="32" name="trust145|card|"/>
+          <p:cNvPr id="32" name="trust149|card|"/>
           <p:cNvSpPr txBox="1"/>
           <p:nvPr/>
         </p:nvSpPr>
@@ -6101,7 +6101,7 @@
       </p:sp>
       <p:sp>
         <p:nvSpPr>
-          <p:cNvPr id="33" name="trust145|card|"/>
+          <p:cNvPr id="33" name="trust149|card|"/>
           <p:cNvSpPr txBox="1"/>
           <p:nvPr/>
         </p:nvSpPr>
@@ -6232,7 +6232,7 @@
       <p:grpSpPr/>
       <p:sp>
         <p:nvSpPr>
-          <p:cNvPr id="2" name="hdr146|eyebrow|"/>
+          <p:cNvPr id="2" name="hdr150|eyebrow|"/>
           <p:cNvSpPr txBox="1"/>
           <p:nvPr/>
         </p:nvSpPr>
@@ -6267,7 +6267,7 @@
       </p:sp>
       <p:sp>
         <p:nvSpPr>
-          <p:cNvPr id="3" name="hdr146|title|"/>
+          <p:cNvPr id="3" name="hdr150|title|"/>
           <p:cNvSpPr txBox="1"/>
           <p:nvPr/>
         </p:nvSpPr>
@@ -6302,7 +6302,7 @@
       </p:sp>
       <p:sp>
         <p:nvSpPr>
-          <p:cNvPr id="4" name="cta147|card|"/>
+          <p:cNvPr id="4" name="cta151|card|"/>
           <p:cNvSpPr/>
           <p:nvPr/>
         </p:nvSpPr>
@@ -6348,7 +6348,7 @@
       </p:sp>
       <p:sp>
         <p:nvSpPr>
-          <p:cNvPr id="5" name="cta147|deco|"/>
+          <p:cNvPr id="5" name="cta151|deco|"/>
           <p:cNvSpPr/>
           <p:nvPr/>
         </p:nvSpPr>
@@ -6392,7 +6392,7 @@
       </p:sp>
       <p:sp>
         <p:nvSpPr>
-          <p:cNvPr id="6" name="cta147|card|"/>
+          <p:cNvPr id="6" name="cta151|card|"/>
           <p:cNvSpPr txBox="1"/>
           <p:nvPr/>
         </p:nvSpPr>
@@ -6427,7 +6427,7 @@
       </p:sp>
       <p:sp>
         <p:nvSpPr>
-          <p:cNvPr id="7" name="cta147|card|"/>
+          <p:cNvPr id="7" name="cta151|card|"/>
           <p:cNvSpPr txBox="1"/>
           <p:nvPr/>
         </p:nvSpPr>
@@ -6462,7 +6462,7 @@
       </p:sp>
       <p:sp>
         <p:nvSpPr>
-          <p:cNvPr id="8" name="cta147|card|"/>
+          <p:cNvPr id="8" name="cta151|card|"/>
           <p:cNvSpPr txBox="1"/>
           <p:nvPr/>
         </p:nvSpPr>
@@ -6497,7 +6497,7 @@
       </p:sp>
       <p:sp>
         <p:nvSpPr>
-          <p:cNvPr id="9" name="cta148|card|"/>
+          <p:cNvPr id="9" name="cta152|card|"/>
           <p:cNvSpPr/>
           <p:nvPr/>
         </p:nvSpPr>
@@ -6543,7 +6543,7 @@
       </p:sp>
       <p:sp>
         <p:nvSpPr>
-          <p:cNvPr id="10" name="cta148|deco|"/>
+          <p:cNvPr id="10" name="cta152|deco|"/>
           <p:cNvSpPr/>
           <p:nvPr/>
         </p:nvSpPr>
@@ -6587,7 +6587,7 @@
       </p:sp>
       <p:sp>
         <p:nvSpPr>
-          <p:cNvPr id="11" name="cta148|card|"/>
+          <p:cNvPr id="11" name="cta152|card|"/>
           <p:cNvSpPr txBox="1"/>
           <p:nvPr/>
         </p:nvSpPr>
@@ -6622,7 +6622,7 @@
       </p:sp>
       <p:sp>
         <p:nvSpPr>
-          <p:cNvPr id="12" name="cta148|card|"/>
+          <p:cNvPr id="12" name="cta152|card|"/>
           <p:cNvSpPr txBox="1"/>
           <p:nvPr/>
         </p:nvSpPr>
@@ -6657,7 +6657,7 @@
       </p:sp>
       <p:sp>
         <p:nvSpPr>
-          <p:cNvPr id="13" name="cta148|card|"/>
+          <p:cNvPr id="13" name="cta152|card|"/>
           <p:cNvSpPr txBox="1"/>
           <p:nvPr/>
         </p:nvSpPr>
@@ -6692,7 +6692,7 @@
       </p:sp>
       <p:sp>
         <p:nvSpPr>
-          <p:cNvPr id="14" name="cta149|card|"/>
+          <p:cNvPr id="14" name="cta153|card|"/>
           <p:cNvSpPr/>
           <p:nvPr/>
         </p:nvSpPr>
@@ -6738,7 +6738,7 @@
       </p:sp>
       <p:sp>
         <p:nvSpPr>
-          <p:cNvPr id="15" name="cta149|deco|"/>
+          <p:cNvPr id="15" name="cta153|deco|"/>
           <p:cNvSpPr/>
           <p:nvPr/>
         </p:nvSpPr>
@@ -6782,7 +6782,7 @@
       </p:sp>
       <p:sp>
         <p:nvSpPr>
-          <p:cNvPr id="16" name="cta149|card|"/>
+          <p:cNvPr id="16" name="cta153|card|"/>
           <p:cNvSpPr txBox="1"/>
           <p:nvPr/>
         </p:nvSpPr>
@@ -6817,7 +6817,7 @@
       </p:sp>
       <p:sp>
         <p:nvSpPr>
-          <p:cNvPr id="17" name="cta149|card|"/>
+          <p:cNvPr id="17" name="cta153|card|"/>
           <p:cNvSpPr txBox="1"/>
           <p:nvPr/>
         </p:nvSpPr>
@@ -6852,7 +6852,7 @@
       </p:sp>
       <p:sp>
         <p:nvSpPr>
-          <p:cNvPr id="18" name="cta149|card|"/>
+          <p:cNvPr id="18" name="cta153|card|"/>
           <p:cNvSpPr txBox="1"/>
           <p:nvPr/>
         </p:nvSpPr>
@@ -6887,7 +6887,7 @@
       </p:sp>
       <p:sp>
         <p:nvSpPr>
-          <p:cNvPr id="19" name="contact150|card|"/>
+          <p:cNvPr id="19" name="contact154|card|"/>
           <p:cNvSpPr/>
           <p:nvPr/>
         </p:nvSpPr>
@@ -6933,7 +6933,7 @@
       </p:sp>
       <p:sp>
         <p:nvSpPr>
-          <p:cNvPr id="20" name="contact150|eyebrow|"/>
+          <p:cNvPr id="20" name="contact154|eyebrow|"/>
           <p:cNvSpPr txBox="1"/>
           <p:nvPr/>
         </p:nvSpPr>
@@ -6968,7 +6968,7 @@
       </p:sp>
       <p:sp>
         <p:nvSpPr>
-          <p:cNvPr id="21" name="contact150|body|"/>
+          <p:cNvPr id="21" name="contact154|body|"/>
           <p:cNvSpPr txBox="1"/>
           <p:nvPr/>
         </p:nvSpPr>
@@ -7051,7 +7051,7 @@
       </p:sp>
       <p:sp>
         <p:nvSpPr>
-          <p:cNvPr id="22" name="contact150|deco|"/>
+          <p:cNvPr id="22" name="contact154|deco|"/>
           <p:cNvSpPr/>
           <p:nvPr/>
         </p:nvSpPr>
@@ -7098,7 +7098,7 @@
       </p:sp>
       <p:sp>
         <p:nvSpPr>
-          <p:cNvPr id="23" name="contact150|caption|"/>
+          <p:cNvPr id="23" name="contact154|caption|"/>
           <p:cNvSpPr txBox="1"/>
           <p:nvPr/>
         </p:nvSpPr>
@@ -7133,7 +7133,7 @@
       </p:sp>
       <p:sp>
         <p:nvSpPr>
-          <p:cNvPr id="24" name="contact150|placeholder|"/>
+          <p:cNvPr id="24" name="contact154|placeholder|"/>
           <p:cNvSpPr txBox="1"/>
           <p:nvPr/>
         </p:nvSpPr>
@@ -7292,7 +7292,7 @@
       <p:grpSpPr/>
       <p:sp>
         <p:nvSpPr>
-          <p:cNvPr id="2" name="hdr151|eyebrow|"/>
+          <p:cNvPr id="2" name="hdr155|eyebrow|"/>
           <p:cNvSpPr txBox="1"/>
           <p:nvPr/>
         </p:nvSpPr>
@@ -7327,7 +7327,7 @@
       </p:sp>
       <p:sp>
         <p:nvSpPr>
-          <p:cNvPr id="3" name="hdr151|title|"/>
+          <p:cNvPr id="3" name="hdr155|title|"/>
           <p:cNvSpPr txBox="1"/>
           <p:nvPr/>
         </p:nvSpPr>
@@ -7362,7 +7362,7 @@
       </p:sp>
       <p:sp>
         <p:nvSpPr>
-          <p:cNvPr id="4" name="faq152|card|"/>
+          <p:cNvPr id="4" name="faq156|card|"/>
           <p:cNvSpPr/>
           <p:nvPr/>
         </p:nvSpPr>
@@ -7408,7 +7408,7 @@
       </p:sp>
       <p:sp>
         <p:nvSpPr>
-          <p:cNvPr id="5" name="faq152|deco|"/>
+          <p:cNvPr id="5" name="faq156|deco|"/>
           <p:cNvSpPr/>
           <p:nvPr/>
         </p:nvSpPr>
@@ -7452,7 +7452,7 @@
       </p:sp>
       <p:pic>
         <p:nvPicPr>
-          <p:cNvPr id="6" name="faq152|icon|chat_deep.png" descr="chat_deep"/>
+          <p:cNvPr id="6" name="faq156|icon|chat_deep.png" descr="chat_deep"/>
           <p:cNvPicPr>
             <a:picLocks noChangeAspect="1"/>
           </p:cNvPicPr>
@@ -7477,7 +7477,7 @@
       </p:pic>
       <p:sp>
         <p:nvSpPr>
-          <p:cNvPr id="7" name="faq152|card|"/>
+          <p:cNvPr id="7" name="faq156|card|"/>
           <p:cNvSpPr txBox="1"/>
           <p:nvPr/>
         </p:nvSpPr>
@@ -7512,7 +7512,7 @@
       </p:sp>
       <p:sp>
         <p:nvSpPr>
-          <p:cNvPr id="8" name="faq152|card|"/>
+          <p:cNvPr id="8" name="faq156|card|"/>
           <p:cNvSpPr txBox="1"/>
           <p:nvPr/>
         </p:nvSpPr>
@@ -7547,7 +7547,7 @@
       </p:sp>
       <p:sp>
         <p:nvSpPr>
-          <p:cNvPr id="9" name="faq153|card|"/>
+          <p:cNvPr id="9" name="faq157|card|"/>
           <p:cNvSpPr/>
           <p:nvPr/>
         </p:nvSpPr>
@@ -7593,7 +7593,7 @@
       </p:sp>
       <p:sp>
         <p:nvSpPr>
-          <p:cNvPr id="10" name="faq153|deco|"/>
+          <p:cNvPr id="10" name="faq157|deco|"/>
           <p:cNvSpPr/>
           <p:nvPr/>
         </p:nvSpPr>
@@ -7637,7 +7637,7 @@
       </p:sp>
       <p:pic>
         <p:nvPicPr>
-          <p:cNvPr id="11" name="faq153|icon|chat_deep.png" descr="chat_deep"/>
+          <p:cNvPr id="11" name="faq157|icon|chat_deep.png" descr="chat_deep"/>
           <p:cNvPicPr>
             <a:picLocks noChangeAspect="1"/>
           </p:cNvPicPr>
@@ -7662,7 +7662,7 @@
       </p:pic>
       <p:sp>
         <p:nvSpPr>
-          <p:cNvPr id="12" name="faq153|card|"/>
+          <p:cNvPr id="12" name="faq157|card|"/>
           <p:cNvSpPr txBox="1"/>
           <p:nvPr/>
         </p:nvSpPr>
@@ -7697,7 +7697,7 @@
       </p:sp>
       <p:sp>
         <p:nvSpPr>
-          <p:cNvPr id="13" name="faq153|card|"/>
+          <p:cNvPr id="13" name="faq157|card|"/>
           <p:cNvSpPr txBox="1"/>
           <p:nvPr/>
         </p:nvSpPr>
@@ -7732,7 +7732,7 @@
       </p:sp>
       <p:sp>
         <p:nvSpPr>
-          <p:cNvPr id="14" name="faq154|card|"/>
+          <p:cNvPr id="14" name="faq158|card|"/>
           <p:cNvSpPr/>
           <p:nvPr/>
         </p:nvSpPr>
@@ -7778,7 +7778,7 @@
       </p:sp>
       <p:sp>
         <p:nvSpPr>
-          <p:cNvPr id="15" name="faq154|deco|"/>
+          <p:cNvPr id="15" name="faq158|deco|"/>
           <p:cNvSpPr/>
           <p:nvPr/>
         </p:nvSpPr>
@@ -7822,7 +7822,7 @@
       </p:sp>
       <p:pic>
         <p:nvPicPr>
-          <p:cNvPr id="16" name="faq154|icon|chat_deep.png" descr="chat_deep"/>
+          <p:cNvPr id="16" name="faq158|icon|chat_deep.png" descr="chat_deep"/>
           <p:cNvPicPr>
             <a:picLocks noChangeAspect="1"/>
           </p:cNvPicPr>
@@ -7847,7 +7847,7 @@
       </p:pic>
       <p:sp>
         <p:nvSpPr>
-          <p:cNvPr id="17" name="faq154|card|"/>
+          <p:cNvPr id="17" name="faq158|card|"/>
           <p:cNvSpPr txBox="1"/>
           <p:nvPr/>
         </p:nvSpPr>
@@ -7882,7 +7882,7 @@
       </p:sp>
       <p:sp>
         <p:nvSpPr>
-          <p:cNvPr id="18" name="faq154|card|"/>
+          <p:cNvPr id="18" name="faq158|card|"/>
           <p:cNvSpPr txBox="1"/>
           <p:nvPr/>
         </p:nvSpPr>
@@ -7910,14 +7910,14 @@
                 </a:solidFill>
                 <a:latin typeface="Inter"/>
               </a:rPr>
-              <a:t>Today, orders arrive as a WhatsApp message and you take payment your usual way. Checkout through FluxMuse (Paystack, South Africa) is being switched on.</a:t>
-            </a:r>
-          </a:p>
-        </p:txBody>
-      </p:sp>
-      <p:sp>
-        <p:nvSpPr>
-          <p:cNvPr id="19" name="faq155|card|"/>
+              <a:t>Today, orders arrive as a WhatsApp message and you take payment your usual way. Checkout through FluxMuse, via our payment partners, is being switched on in South Africa.</a:t>
+            </a:r>
+          </a:p>
+        </p:txBody>
+      </p:sp>
+      <p:sp>
+        <p:nvSpPr>
+          <p:cNvPr id="19" name="faq159|card|"/>
           <p:cNvSpPr/>
           <p:nvPr/>
         </p:nvSpPr>
@@ -7963,7 +7963,7 @@
       </p:sp>
       <p:sp>
         <p:nvSpPr>
-          <p:cNvPr id="20" name="faq155|deco|"/>
+          <p:cNvPr id="20" name="faq159|deco|"/>
           <p:cNvSpPr/>
           <p:nvPr/>
         </p:nvSpPr>
@@ -8007,7 +8007,7 @@
       </p:sp>
       <p:pic>
         <p:nvPicPr>
-          <p:cNvPr id="21" name="faq155|icon|chat_deep.png" descr="chat_deep"/>
+          <p:cNvPr id="21" name="faq159|icon|chat_deep.png" descr="chat_deep"/>
           <p:cNvPicPr>
             <a:picLocks noChangeAspect="1"/>
           </p:cNvPicPr>
@@ -8032,7 +8032,7 @@
       </p:pic>
       <p:sp>
         <p:nvSpPr>
-          <p:cNvPr id="22" name="faq155|card|"/>
+          <p:cNvPr id="22" name="faq159|card|"/>
           <p:cNvSpPr txBox="1"/>
           <p:nvPr/>
         </p:nvSpPr>
@@ -8067,7 +8067,7 @@
       </p:sp>
       <p:sp>
         <p:nvSpPr>
-          <p:cNvPr id="23" name="faq155|placeholder|"/>
+          <p:cNvPr id="23" name="faq159|placeholder|"/>
           <p:cNvSpPr txBox="1"/>
           <p:nvPr/>
         </p:nvSpPr>
@@ -8198,7 +8198,7 @@
       <p:grpSpPr/>
       <p:sp>
         <p:nvSpPr>
-          <p:cNvPr id="2" name="hdr156|eyebrow|"/>
+          <p:cNvPr id="2" name="hdr160|eyebrow|"/>
           <p:cNvSpPr txBox="1"/>
           <p:nvPr/>
         </p:nvSpPr>
@@ -8233,7 +8233,7 @@
       </p:sp>
       <p:sp>
         <p:nvSpPr>
-          <p:cNvPr id="3" name="hdr156|title|"/>
+          <p:cNvPr id="3" name="hdr160|title|"/>
           <p:cNvSpPr txBox="1"/>
           <p:nvPr/>
         </p:nvSpPr>
@@ -8268,7 +8268,7 @@
       </p:sp>
       <p:sp>
         <p:nvSpPr>
-          <p:cNvPr id="4" name="faq157|card|"/>
+          <p:cNvPr id="4" name="faq161|card|"/>
           <p:cNvSpPr/>
           <p:nvPr/>
         </p:nvSpPr>
@@ -8314,7 +8314,7 @@
       </p:sp>
       <p:sp>
         <p:nvSpPr>
-          <p:cNvPr id="5" name="faq157|deco|"/>
+          <p:cNvPr id="5" name="faq161|deco|"/>
           <p:cNvSpPr/>
           <p:nvPr/>
         </p:nvSpPr>
@@ -8358,7 +8358,7 @@
       </p:sp>
       <p:pic>
         <p:nvPicPr>
-          <p:cNvPr id="6" name="faq157|icon|chat_deep.png" descr="chat_deep"/>
+          <p:cNvPr id="6" name="faq161|icon|chat_deep.png" descr="chat_deep"/>
           <p:cNvPicPr>
             <a:picLocks noChangeAspect="1"/>
           </p:cNvPicPr>
@@ -8383,7 +8383,7 @@
       </p:pic>
       <p:sp>
         <p:nvSpPr>
-          <p:cNvPr id="7" name="faq157|card|"/>
+          <p:cNvPr id="7" name="faq161|card|"/>
           <p:cNvSpPr txBox="1"/>
           <p:nvPr/>
         </p:nvSpPr>
@@ -8418,7 +8418,7 @@
       </p:sp>
       <p:sp>
         <p:nvSpPr>
-          <p:cNvPr id="8" name="faq157|card|"/>
+          <p:cNvPr id="8" name="faq161|card|"/>
           <p:cNvSpPr txBox="1"/>
           <p:nvPr/>
         </p:nvSpPr>
@@ -8453,7 +8453,7 @@
       </p:sp>
       <p:sp>
         <p:nvSpPr>
-          <p:cNvPr id="9" name="faq158|card|"/>
+          <p:cNvPr id="9" name="faq162|card|"/>
           <p:cNvSpPr/>
           <p:nvPr/>
         </p:nvSpPr>
@@ -8499,7 +8499,7 @@
       </p:sp>
       <p:sp>
         <p:nvSpPr>
-          <p:cNvPr id="10" name="faq158|deco|"/>
+          <p:cNvPr id="10" name="faq162|deco|"/>
           <p:cNvSpPr/>
           <p:nvPr/>
         </p:nvSpPr>
@@ -8543,7 +8543,7 @@
       </p:sp>
       <p:pic>
         <p:nvPicPr>
-          <p:cNvPr id="11" name="faq158|icon|chat_deep.png" descr="chat_deep"/>
+          <p:cNvPr id="11" name="faq162|icon|chat_deep.png" descr="chat_deep"/>
           <p:cNvPicPr>
             <a:picLocks noChangeAspect="1"/>
           </p:cNvPicPr>
@@ -8568,7 +8568,7 @@
       </p:pic>
       <p:sp>
         <p:nvSpPr>
-          <p:cNvPr id="12" name="faq158|card|"/>
+          <p:cNvPr id="12" name="faq162|card|"/>
           <p:cNvSpPr txBox="1"/>
           <p:nvPr/>
         </p:nvSpPr>
@@ -8603,7 +8603,7 @@
       </p:sp>
       <p:sp>
         <p:nvSpPr>
-          <p:cNvPr id="13" name="faq158|card|"/>
+          <p:cNvPr id="13" name="faq162|card|"/>
           <p:cNvSpPr txBox="1"/>
           <p:nvPr/>
         </p:nvSpPr>
@@ -8638,7 +8638,7 @@
       </p:sp>
       <p:sp>
         <p:nvSpPr>
-          <p:cNvPr id="14" name="faq159|card|"/>
+          <p:cNvPr id="14" name="faq163|card|"/>
           <p:cNvSpPr/>
           <p:nvPr/>
         </p:nvSpPr>
@@ -8684,7 +8684,7 @@
       </p:sp>
       <p:sp>
         <p:nvSpPr>
-          <p:cNvPr id="15" name="faq159|deco|"/>
+          <p:cNvPr id="15" name="faq163|deco|"/>
           <p:cNvSpPr/>
           <p:nvPr/>
         </p:nvSpPr>
@@ -8728,7 +8728,7 @@
       </p:sp>
       <p:pic>
         <p:nvPicPr>
-          <p:cNvPr id="16" name="faq159|icon|chat_deep.png" descr="chat_deep"/>
+          <p:cNvPr id="16" name="faq163|icon|chat_deep.png" descr="chat_deep"/>
           <p:cNvPicPr>
             <a:picLocks noChangeAspect="1"/>
           </p:cNvPicPr>
@@ -8753,7 +8753,7 @@
       </p:pic>
       <p:sp>
         <p:nvSpPr>
-          <p:cNvPr id="17" name="faq159|card|"/>
+          <p:cNvPr id="17" name="faq163|card|"/>
           <p:cNvSpPr txBox="1"/>
           <p:nvPr/>
         </p:nvSpPr>
@@ -8788,7 +8788,7 @@
       </p:sp>
       <p:sp>
         <p:nvSpPr>
-          <p:cNvPr id="18" name="faq159|card|"/>
+          <p:cNvPr id="18" name="faq163|card|"/>
           <p:cNvSpPr txBox="1"/>
           <p:nvPr/>
         </p:nvSpPr>
@@ -8816,14 +8816,14 @@
                 </a:solidFill>
                 <a:latin typeface="Inter"/>
               </a:rPr>
-              <a:t>Keep them. Sync from Shopify, WooCommerce and Takealot is being switched on. Until then, we build your catalogue from product photos.</a:t>
-            </a:r>
-          </a:p>
-        </p:txBody>
-      </p:sp>
-      <p:sp>
-        <p:nvSpPr>
-          <p:cNvPr id="19" name="faq160|card|"/>
+              <a:t>Keep them. Sync from Shopify and WooCommerce is being switched on. Until then, we build your catalogue from product photos.</a:t>
+            </a:r>
+          </a:p>
+        </p:txBody>
+      </p:sp>
+      <p:sp>
+        <p:nvSpPr>
+          <p:cNvPr id="19" name="faq164|card|"/>
           <p:cNvSpPr/>
           <p:nvPr/>
         </p:nvSpPr>
@@ -8869,7 +8869,7 @@
       </p:sp>
       <p:sp>
         <p:nvSpPr>
-          <p:cNvPr id="20" name="faq160|deco|"/>
+          <p:cNvPr id="20" name="faq164|deco|"/>
           <p:cNvSpPr/>
           <p:nvPr/>
         </p:nvSpPr>
@@ -8913,7 +8913,7 @@
       </p:sp>
       <p:pic>
         <p:nvPicPr>
-          <p:cNvPr id="21" name="faq160|icon|chat_deep.png" descr="chat_deep"/>
+          <p:cNvPr id="21" name="faq164|icon|chat_deep.png" descr="chat_deep"/>
           <p:cNvPicPr>
             <a:picLocks noChangeAspect="1"/>
           </p:cNvPicPr>
@@ -8938,7 +8938,7 @@
       </p:pic>
       <p:sp>
         <p:nvSpPr>
-          <p:cNvPr id="22" name="faq160|card|"/>
+          <p:cNvPr id="22" name="faq164|card|"/>
           <p:cNvSpPr txBox="1"/>
           <p:nvPr/>
         </p:nvSpPr>
@@ -8973,7 +8973,7 @@
       </p:sp>
       <p:sp>
         <p:nvSpPr>
-          <p:cNvPr id="23" name="faq160|card|"/>
+          <p:cNvPr id="23" name="faq164|card|"/>
           <p:cNvSpPr txBox="1"/>
           <p:nvPr/>
         </p:nvSpPr>
@@ -9104,7 +9104,7 @@
       <p:grpSpPr/>
       <p:sp>
         <p:nvSpPr>
-          <p:cNvPr id="2" name="hdr102|eyebrow|"/>
+          <p:cNvPr id="2" name="hdr106|eyebrow|"/>
           <p:cNvSpPr txBox="1"/>
           <p:nvPr/>
         </p:nvSpPr>
@@ -9139,7 +9139,7 @@
       </p:sp>
       <p:sp>
         <p:nvSpPr>
-          <p:cNvPr id="3" name="hdr102|title|"/>
+          <p:cNvPr id="3" name="hdr106|title|"/>
           <p:cNvSpPr txBox="1"/>
           <p:nvPr/>
         </p:nvSpPr>
@@ -9174,7 +9174,7 @@
       </p:sp>
       <p:pic>
         <p:nvPicPr>
-          <p:cNvPr id="4" name="g103|img|infographics/problem-solution.png" descr="Today: disconnected tools, retainers beyond small budgets, orders lost in chats, after-hours messages unanswered. With FluxMuse: an AI marketing team in WhatsApp, paid plans from R149, photos to a catalogue and shop link, answers in the customer's language."/>
+          <p:cNvPr id="4" name="g107|img|infographics/problem-solution.png" descr="Today: disconnected tools, retainers beyond small budgets, orders lost in chats, after-hours messages unanswered. With FluxMuse: an AI marketing team in WhatsApp, paid plans from R149, photos to a catalogue and shop link, answers in the customer's language."/>
           <p:cNvPicPr>
             <a:picLocks noChangeAspect="1"/>
           </p:cNvPicPr>
@@ -9295,7 +9295,7 @@
       <p:grpSpPr/>
       <p:sp>
         <p:nvSpPr>
-          <p:cNvPr id="2" name="hdr104|eyebrow|"/>
+          <p:cNvPr id="2" name="hdr108|eyebrow|"/>
           <p:cNvSpPr txBox="1"/>
           <p:nvPr/>
         </p:nvSpPr>
@@ -9330,7 +9330,7 @@
       </p:sp>
       <p:sp>
         <p:nvSpPr>
-          <p:cNvPr id="3" name="hdr104|title|"/>
+          <p:cNvPr id="3" name="hdr108|title|"/>
           <p:cNvSpPr txBox="1"/>
           <p:nvPr/>
         </p:nvSpPr>
@@ -9369,7 +9369,7 @@
       </p:sp>
       <p:sp>
         <p:nvSpPr>
-          <p:cNvPr id="4" name="g105|body|"/>
+          <p:cNvPr id="4" name="g109|body|"/>
           <p:cNvSpPr txBox="1"/>
           <p:nvPr/>
         </p:nvSpPr>
@@ -9404,7 +9404,7 @@
       </p:sp>
       <p:sp>
         <p:nvSpPr>
-          <p:cNvPr id="5" name="g106|chip|"/>
+          <p:cNvPr id="5" name="g110|chip|"/>
           <p:cNvSpPr/>
           <p:nvPr/>
         </p:nvSpPr>
@@ -9450,7 +9450,7 @@
       </p:sp>
       <p:sp>
         <p:nvSpPr>
-          <p:cNvPr id="6" name="g106|chip|"/>
+          <p:cNvPr id="6" name="g110|chip|"/>
           <p:cNvSpPr txBox="1"/>
           <p:nvPr/>
         </p:nvSpPr>
@@ -9485,7 +9485,7 @@
       </p:sp>
       <p:sp>
         <p:nvSpPr>
-          <p:cNvPr id="7" name="meet107|card|"/>
+          <p:cNvPr id="7" name="meet111|card|"/>
           <p:cNvSpPr/>
           <p:nvPr/>
         </p:nvSpPr>
@@ -9531,7 +9531,7 @@
       </p:sp>
       <p:sp>
         <p:nvSpPr>
-          <p:cNvPr id="8" name="meet107|eyebrow|"/>
+          <p:cNvPr id="8" name="meet111|eyebrow|"/>
           <p:cNvSpPr txBox="1"/>
           <p:nvPr/>
         </p:nvSpPr>
@@ -9566,7 +9566,7 @@
       </p:sp>
       <p:pic>
         <p:nvPicPr>
-          <p:cNvPr id="9" name="g108|icon|checkCircle_orange.png" descr="checkCircle_orange"/>
+          <p:cNvPr id="9" name="g112|icon|checkCircle_orange.png" descr="checkCircle_orange"/>
           <p:cNvPicPr>
             <a:picLocks noChangeAspect="1"/>
           </p:cNvPicPr>
@@ -9591,7 +9591,7 @@
       </p:pic>
       <p:sp>
         <p:nvSpPr>
-          <p:cNvPr id="10" name="g108|card|"/>
+          <p:cNvPr id="10" name="g112|card|"/>
           <p:cNvSpPr txBox="1"/>
           <p:nvPr/>
         </p:nvSpPr>
@@ -9626,7 +9626,7 @@
       </p:sp>
       <p:pic>
         <p:nvPicPr>
-          <p:cNvPr id="11" name="g109|icon|checkCircle_orange.png" descr="checkCircle_orange"/>
+          <p:cNvPr id="11" name="g113|icon|checkCircle_orange.png" descr="checkCircle_orange"/>
           <p:cNvPicPr>
             <a:picLocks noChangeAspect="1"/>
           </p:cNvPicPr>
@@ -9651,7 +9651,7 @@
       </p:pic>
       <p:sp>
         <p:nvSpPr>
-          <p:cNvPr id="12" name="g109|card|"/>
+          <p:cNvPr id="12" name="g113|card|"/>
           <p:cNvSpPr txBox="1"/>
           <p:nvPr/>
         </p:nvSpPr>
@@ -9686,7 +9686,7 @@
       </p:sp>
       <p:pic>
         <p:nvPicPr>
-          <p:cNvPr id="13" name="g110|icon|checkCircle_orange.png" descr="checkCircle_orange"/>
+          <p:cNvPr id="13" name="g114|icon|checkCircle_orange.png" descr="checkCircle_orange"/>
           <p:cNvPicPr>
             <a:picLocks noChangeAspect="1"/>
           </p:cNvPicPr>
@@ -9711,7 +9711,7 @@
       </p:pic>
       <p:sp>
         <p:nvSpPr>
-          <p:cNvPr id="14" name="g110|card|"/>
+          <p:cNvPr id="14" name="g114|card|"/>
           <p:cNvSpPr txBox="1"/>
           <p:nvPr/>
         </p:nvSpPr>
@@ -9746,7 +9746,7 @@
       </p:sp>
       <p:pic>
         <p:nvPicPr>
-          <p:cNvPr id="15" name="g111|icon|checkCircle_orange.png" descr="checkCircle_orange"/>
+          <p:cNvPr id="15" name="g115|icon|checkCircle_orange.png" descr="checkCircle_orange"/>
           <p:cNvPicPr>
             <a:picLocks noChangeAspect="1"/>
           </p:cNvPicPr>
@@ -9771,7 +9771,7 @@
       </p:pic>
       <p:sp>
         <p:nvSpPr>
-          <p:cNvPr id="16" name="g111|card|"/>
+          <p:cNvPr id="16" name="g115|card|"/>
           <p:cNvSpPr txBox="1"/>
           <p:nvPr/>
         </p:nvSpPr>
@@ -9806,7 +9806,7 @@
       </p:sp>
       <p:pic>
         <p:nvPicPr>
-          <p:cNvPr id="17" name="g112|icon|checkCircle_orange.png" descr="checkCircle_orange"/>
+          <p:cNvPr id="17" name="g116|icon|checkCircle_orange.png" descr="checkCircle_orange"/>
           <p:cNvPicPr>
             <a:picLocks noChangeAspect="1"/>
           </p:cNvPicPr>
@@ -9831,7 +9831,7 @@
       </p:pic>
       <p:sp>
         <p:nvSpPr>
-          <p:cNvPr id="18" name="g112|card|"/>
+          <p:cNvPr id="18" name="g116|card|"/>
           <p:cNvSpPr txBox="1"/>
           <p:nvPr/>
         </p:nvSpPr>
@@ -9866,7 +9866,7 @@
       </p:sp>
       <p:sp>
         <p:nvSpPr>
-          <p:cNvPr id="19" name="meet113|card|"/>
+          <p:cNvPr id="19" name="meet117|card|"/>
           <p:cNvSpPr/>
           <p:nvPr/>
         </p:nvSpPr>
@@ -9912,7 +9912,7 @@
       </p:sp>
       <p:sp>
         <p:nvSpPr>
-          <p:cNvPr id="20" name="meet113|eyebrow|"/>
+          <p:cNvPr id="20" name="meet117|eyebrow|"/>
           <p:cNvSpPr txBox="1"/>
           <p:nvPr/>
         </p:nvSpPr>
@@ -9947,7 +9947,7 @@
       </p:sp>
       <p:pic>
         <p:nvPicPr>
-          <p:cNvPr id="21" name="g114|icon|clock_white.png" descr="clock_white"/>
+          <p:cNvPr id="21" name="g118|icon|clock_white.png" descr="clock_white"/>
           <p:cNvPicPr>
             <a:picLocks noChangeAspect="1"/>
           </p:cNvPicPr>
@@ -9972,7 +9972,7 @@
       </p:pic>
       <p:sp>
         <p:nvSpPr>
-          <p:cNvPr id="22" name="g114|card|"/>
+          <p:cNvPr id="22" name="g118|card|"/>
           <p:cNvSpPr txBox="1"/>
           <p:nvPr/>
         </p:nvSpPr>
@@ -10007,7 +10007,7 @@
       </p:sp>
       <p:pic>
         <p:nvPicPr>
-          <p:cNvPr id="23" name="g115|icon|clock_white.png" descr="clock_white"/>
+          <p:cNvPr id="23" name="g119|icon|clock_white.png" descr="clock_white"/>
           <p:cNvPicPr>
             <a:picLocks noChangeAspect="1"/>
           </p:cNvPicPr>
@@ -10032,7 +10032,7 @@
       </p:pic>
       <p:sp>
         <p:nvSpPr>
-          <p:cNvPr id="24" name="g115|card|"/>
+          <p:cNvPr id="24" name="g119|card|"/>
           <p:cNvSpPr txBox="1"/>
           <p:nvPr/>
         </p:nvSpPr>
@@ -10067,7 +10067,7 @@
       </p:sp>
       <p:pic>
         <p:nvPicPr>
-          <p:cNvPr id="25" name="g116|icon|clock_white.png" descr="clock_white"/>
+          <p:cNvPr id="25" name="g120|icon|clock_white.png" descr="clock_white"/>
           <p:cNvPicPr>
             <a:picLocks noChangeAspect="1"/>
           </p:cNvPicPr>
@@ -10092,7 +10092,7 @@
       </p:pic>
       <p:sp>
         <p:nvSpPr>
-          <p:cNvPr id="26" name="g116|card|"/>
+          <p:cNvPr id="26" name="g120|card|"/>
           <p:cNvSpPr txBox="1"/>
           <p:nvPr/>
         </p:nvSpPr>
@@ -10223,7 +10223,7 @@
       <p:grpSpPr/>
       <p:sp>
         <p:nvSpPr>
-          <p:cNvPr id="2" name="hdr117|eyebrow|"/>
+          <p:cNvPr id="2" name="hdr121|eyebrow|"/>
           <p:cNvSpPr txBox="1"/>
           <p:nvPr/>
         </p:nvSpPr>
@@ -10258,7 +10258,7 @@
       </p:sp>
       <p:sp>
         <p:nvSpPr>
-          <p:cNvPr id="3" name="hdr117|title|"/>
+          <p:cNvPr id="3" name="hdr121|title|"/>
           <p:cNvSpPr txBox="1"/>
           <p:nvPr/>
         </p:nvSpPr>
@@ -10293,7 +10293,7 @@
       </p:sp>
       <p:pic>
         <p:nvPicPr>
-          <p:cNvPr id="4" name="g118|img|infographics/how-fluxmuse-works.png" descr="Loop: Plan, Create (captions, images, short clips), Publish (WhatsApp Status, consented broadcasts, TikTok), Sell (shop link from photos, every order on WhatsApp), Learn"/>
+          <p:cNvPr id="4" name="g122|img|infographics/how-fluxmuse-works.png" descr="Loop: Plan, Create (captions, images, short clips), Publish (WhatsApp Status, consented broadcasts, TikTok), Sell (shop link from photos, every order on WhatsApp), Learn"/>
           <p:cNvPicPr>
             <a:picLocks noChangeAspect="1"/>
           </p:cNvPicPr>
@@ -10414,7 +10414,7 @@
       <p:grpSpPr/>
       <p:sp>
         <p:nvSpPr>
-          <p:cNvPr id="2" name="hdr119|eyebrow|"/>
+          <p:cNvPr id="2" name="hdr123|eyebrow|"/>
           <p:cNvSpPr txBox="1"/>
           <p:nvPr/>
         </p:nvSpPr>
@@ -10449,7 +10449,7 @@
       </p:sp>
       <p:sp>
         <p:nvSpPr>
-          <p:cNvPr id="3" name="hdr119|title|"/>
+          <p:cNvPr id="3" name="hdr123|title|"/>
           <p:cNvSpPr txBox="1"/>
           <p:nvPr/>
         </p:nvSpPr>
@@ -10484,7 +10484,7 @@
       </p:sp>
       <p:pic>
         <p:nvPicPr>
-          <p:cNvPr id="4" name="g120|img|infographics/whatsapp-commerce-flow.png" descr="Discover, Chat, Catalog, Cart, Pay (Paystack, South Africa, being switched on), Order alert, Come back; checkout through FluxMuse not yet tested with real money"/>
+          <p:cNvPr id="4" name="g124|img|infographics/whatsapp-commerce-flow.png" descr="Discover, Chat, Catalog, Cart, Pay (card and EFT in South Africa, being switched on), Order alert, Come back; checkout through FluxMuse not yet tested with real money"/>
           <p:cNvPicPr>
             <a:picLocks noChangeAspect="1"/>
           </p:cNvPicPr>
@@ -10605,7 +10605,7 @@
       <p:grpSpPr/>
       <p:sp>
         <p:nvSpPr>
-          <p:cNvPr id="2" name="hdr121|eyebrow|"/>
+          <p:cNvPr id="2" name="hdr125|eyebrow|"/>
           <p:cNvSpPr txBox="1"/>
           <p:nvPr/>
         </p:nvSpPr>
@@ -10640,7 +10640,7 @@
       </p:sp>
       <p:sp>
         <p:nvSpPr>
-          <p:cNvPr id="3" name="hdr121|title|"/>
+          <p:cNvPr id="3" name="hdr125|title|"/>
           <p:cNvSpPr txBox="1"/>
           <p:nvPr/>
         </p:nvSpPr>
@@ -10675,7 +10675,7 @@
       </p:sp>
       <p:pic>
         <p:nvPicPr>
-          <p:cNvPr id="4" name="g122|img|infographics/segment-solo.png" descr="Solo entrepreneurs: three pains, three newly launched answers, Nano R149 a month, Founding Member R104 for the first two bills"/>
+          <p:cNvPr id="4" name="g126|img|infographics/segment-solo.png" descr="Solo entrepreneurs: three pains, three newly launched answers, Nano R149 a month, Founding Member R104 for the first two bills"/>
           <p:cNvPicPr>
             <a:picLocks noChangeAspect="1"/>
           </p:cNvPicPr>
@@ -10796,7 +10796,7 @@
       <p:grpSpPr/>
       <p:sp>
         <p:nvSpPr>
-          <p:cNvPr id="2" name="hdr123|eyebrow|"/>
+          <p:cNvPr id="2" name="hdr127|eyebrow|"/>
           <p:cNvSpPr txBox="1"/>
           <p:nvPr/>
         </p:nvSpPr>
@@ -10831,7 +10831,7 @@
       </p:sp>
       <p:sp>
         <p:nvSpPr>
-          <p:cNvPr id="3" name="hdr123|title|"/>
+          <p:cNvPr id="3" name="hdr127|title|"/>
           <p:cNvSpPr txBox="1"/>
           <p:nvPr/>
         </p:nvSpPr>
@@ -10866,7 +10866,7 @@
       </p:sp>
       <p:pic>
         <p:nvPicPr>
-          <p:cNvPr id="4" name="g124|img|infographics/brand-engagement-journey.png" descr="Discovery call, demo on your products, set up by hand, go live (lead guarantee starts), weekly check-ins, keep growing; measures agreed together"/>
+          <p:cNvPr id="4" name="g128|img|infographics/brand-engagement-journey.png" descr="Discovery call, demo on your products, set up by hand, go live (lead guarantee starts), weekly check-ins, keep growing; measures agreed together"/>
           <p:cNvPicPr>
             <a:picLocks noChangeAspect="1"/>
           </p:cNvPicPr>
@@ -10987,7 +10987,7 @@
       <p:grpSpPr/>
       <p:sp>
         <p:nvSpPr>
-          <p:cNvPr id="2" name="hdr125|eyebrow|"/>
+          <p:cNvPr id="2" name="hdr129|eyebrow|"/>
           <p:cNvSpPr txBox="1"/>
           <p:nvPr/>
         </p:nvSpPr>
@@ -11022,7 +11022,7 @@
       </p:sp>
       <p:sp>
         <p:nvSpPr>
-          <p:cNvPr id="3" name="hdr125|title|"/>
+          <p:cNvPr id="3" name="hdr129|title|"/>
           <p:cNvSpPr txBox="1"/>
           <p:nvPr/>
         </p:nvSpPr>
@@ -11057,7 +11057,7 @@
       </p:sp>
       <p:sp>
         <p:nvSpPr>
-          <p:cNvPr id="4" name="fg126|card|"/>
+          <p:cNvPr id="4" name="fg130|card|"/>
           <p:cNvSpPr/>
           <p:nvPr/>
         </p:nvSpPr>
@@ -11103,7 +11103,7 @@
       </p:sp>
       <p:sp>
         <p:nvSpPr>
-          <p:cNvPr id="5" name="fg126|card|"/>
+          <p:cNvPr id="5" name="fg130|card|"/>
           <p:cNvSpPr txBox="1"/>
           <p:nvPr/>
         </p:nvSpPr>
@@ -11138,7 +11138,7 @@
       </p:sp>
       <p:sp>
         <p:nvSpPr>
-          <p:cNvPr id="6" name="g127|deco|"/>
+          <p:cNvPr id="6" name="g131|deco|"/>
           <p:cNvSpPr/>
           <p:nvPr/>
         </p:nvSpPr>
@@ -11182,7 +11182,7 @@
       </p:sp>
       <p:pic>
         <p:nvPicPr>
-          <p:cNvPr id="7" name="g127|icon|users_deep.png" descr="users_deep"/>
+          <p:cNvPr id="7" name="g131|icon|users_deep.png" descr="users_deep"/>
           <p:cNvPicPr>
             <a:picLocks noChangeAspect="1"/>
           </p:cNvPicPr>
@@ -11207,7 +11207,7 @@
       </p:pic>
       <p:sp>
         <p:nvSpPr>
-          <p:cNvPr id="8" name="g127|body|"/>
+          <p:cNvPr id="8" name="g131|body|"/>
           <p:cNvSpPr txBox="1"/>
           <p:nvPr/>
         </p:nvSpPr>
@@ -11242,7 +11242,7 @@
       </p:sp>
       <p:sp>
         <p:nvSpPr>
-          <p:cNvPr id="9" name="g128|deco|"/>
+          <p:cNvPr id="9" name="g132|deco|"/>
           <p:cNvSpPr/>
           <p:nvPr/>
         </p:nvSpPr>
@@ -11286,7 +11286,7 @@
       </p:sp>
       <p:pic>
         <p:nvPicPr>
-          <p:cNvPr id="10" name="g128|icon|calendar_deep.png" descr="calendar_deep"/>
+          <p:cNvPr id="10" name="g132|icon|calendar_deep.png" descr="calendar_deep"/>
           <p:cNvPicPr>
             <a:picLocks noChangeAspect="1"/>
           </p:cNvPicPr>
@@ -11311,7 +11311,7 @@
       </p:pic>
       <p:sp>
         <p:nvSpPr>
-          <p:cNvPr id="11" name="g128|body|"/>
+          <p:cNvPr id="11" name="g132|body|"/>
           <p:cNvSpPr txBox="1"/>
           <p:nvPr/>
         </p:nvSpPr>
@@ -11346,7 +11346,7 @@
       </p:sp>
       <p:sp>
         <p:nvSpPr>
-          <p:cNvPr id="12" name="g129|deco|"/>
+          <p:cNvPr id="12" name="g133|deco|"/>
           <p:cNvSpPr/>
           <p:nvPr/>
         </p:nvSpPr>
@@ -11390,7 +11390,7 @@
       </p:sp>
       <p:pic>
         <p:nvPicPr>
-          <p:cNvPr id="13" name="g129|icon|chat_deep.png" descr="chat_deep"/>
+          <p:cNvPr id="13" name="g133|icon|chat_deep.png" descr="chat_deep"/>
           <p:cNvPicPr>
             <a:picLocks noChangeAspect="1"/>
           </p:cNvPicPr>
@@ -11415,7 +11415,7 @@
       </p:pic>
       <p:sp>
         <p:nvSpPr>
-          <p:cNvPr id="14" name="g129|body|"/>
+          <p:cNvPr id="14" name="g133|body|"/>
           <p:cNvSpPr txBox="1"/>
           <p:nvPr/>
         </p:nvSpPr>
@@ -11450,7 +11450,7 @@
       </p:sp>
       <p:sp>
         <p:nvSpPr>
-          <p:cNvPr id="15" name="g130|deco|"/>
+          <p:cNvPr id="15" name="g134|deco|"/>
           <p:cNvSpPr/>
           <p:nvPr/>
         </p:nvSpPr>
@@ -11494,7 +11494,7 @@
       </p:sp>
       <p:pic>
         <p:nvPicPr>
-          <p:cNvPr id="16" name="g130|icon|shield_deep.png" descr="shield_deep"/>
+          <p:cNvPr id="16" name="g134|icon|shield_deep.png" descr="shield_deep"/>
           <p:cNvPicPr>
             <a:picLocks noChangeAspect="1"/>
           </p:cNvPicPr>
@@ -11519,7 +11519,7 @@
       </p:pic>
       <p:sp>
         <p:nvSpPr>
-          <p:cNvPr id="17" name="g130|body|"/>
+          <p:cNvPr id="17" name="g134|body|"/>
           <p:cNvSpPr txBox="1"/>
           <p:nvPr/>
         </p:nvSpPr>
@@ -11554,7 +11554,7 @@
       </p:sp>
       <p:sp>
         <p:nvSpPr>
-          <p:cNvPr id="18" name="lg131|card|"/>
+          <p:cNvPr id="18" name="lg135|card|"/>
           <p:cNvSpPr/>
           <p:nvPr/>
         </p:nvSpPr>
@@ -11600,7 +11600,7 @@
       </p:sp>
       <p:sp>
         <p:nvSpPr>
-          <p:cNvPr id="19" name="lg131|deco|"/>
+          <p:cNvPr id="19" name="lg135|deco|"/>
           <p:cNvSpPr/>
           <p:nvPr/>
         </p:nvSpPr>
@@ -11644,7 +11644,7 @@
       </p:sp>
       <p:pic>
         <p:nvPicPr>
-          <p:cNvPr id="20" name="lg131|icon|target_deep.png" descr="target_deep"/>
+          <p:cNvPr id="20" name="lg135|icon|target_deep.png" descr="target_deep"/>
           <p:cNvPicPr>
             <a:picLocks noChangeAspect="1"/>
           </p:cNvPicPr>
@@ -11669,7 +11669,7 @@
       </p:pic>
       <p:sp>
         <p:nvSpPr>
-          <p:cNvPr id="21" name="lg131|eyebrow|"/>
+          <p:cNvPr id="21" name="lg135|eyebrow|"/>
           <p:cNvSpPr txBox="1"/>
           <p:nvPr/>
         </p:nvSpPr>
@@ -11704,7 +11704,7 @@
       </p:sp>
       <p:sp>
         <p:nvSpPr>
-          <p:cNvPr id="22" name="lg131|card|"/>
+          <p:cNvPr id="22" name="lg135|card|"/>
           <p:cNvSpPr txBox="1"/>
           <p:nvPr/>
         </p:nvSpPr>
@@ -11743,7 +11743,7 @@
       </p:sp>
       <p:sp>
         <p:nvSpPr>
-          <p:cNvPr id="23" name="lg131|caption|"/>
+          <p:cNvPr id="23" name="lg135|caption|"/>
           <p:cNvSpPr txBox="1"/>
           <p:nvPr/>
         </p:nvSpPr>
@@ -11878,7 +11878,7 @@
       <p:grpSpPr/>
       <p:sp>
         <p:nvSpPr>
-          <p:cNvPr id="2" name="hdr132|eyebrow|"/>
+          <p:cNvPr id="2" name="hdr136|eyebrow|"/>
           <p:cNvSpPr txBox="1"/>
           <p:nvPr/>
         </p:nvSpPr>
@@ -11913,7 +11913,7 @@
       </p:sp>
       <p:sp>
         <p:nvSpPr>
-          <p:cNvPr id="3" name="hdr132|title|"/>
+          <p:cNvPr id="3" name="hdr136|title|"/>
           <p:cNvSpPr txBox="1"/>
           <p:nvPr/>
         </p:nvSpPr>
@@ -11948,7 +11948,7 @@
       </p:sp>
       <p:sp>
         <p:nvSpPr>
-          <p:cNvPr id="4" name="plan133|card|"/>
+          <p:cNvPr id="4" name="plan137|card|"/>
           <p:cNvSpPr/>
           <p:nvPr/>
         </p:nvSpPr>
@@ -11996,7 +11996,7 @@
       </p:sp>
       <p:sp>
         <p:nvSpPr>
-          <p:cNvPr id="5" name="plan133|card|"/>
+          <p:cNvPr id="5" name="plan137|card|"/>
           <p:cNvSpPr txBox="1"/>
           <p:nvPr/>
         </p:nvSpPr>
@@ -12031,7 +12031,7 @@
       </p:sp>
       <p:sp>
         <p:nvSpPr>
-          <p:cNvPr id="6" name="plan133|card|"/>
+          <p:cNvPr id="6" name="plan137|card|"/>
           <p:cNvSpPr txBox="1"/>
           <p:nvPr/>
         </p:nvSpPr>
@@ -12075,7 +12075,7 @@
       </p:sp>
       <p:sp>
         <p:nvSpPr>
-          <p:cNvPr id="7" name="plan133|caption|"/>
+          <p:cNvPr id="7" name="plan137|caption|"/>
           <p:cNvSpPr txBox="1"/>
           <p:nvPr/>
         </p:nvSpPr>
@@ -12110,7 +12110,7 @@
       </p:sp>
       <p:sp>
         <p:nvSpPr>
-          <p:cNvPr id="8" name="plan133|card|"/>
+          <p:cNvPr id="8" name="plan137|card|"/>
           <p:cNvSpPr txBox="1"/>
           <p:nvPr/>
         </p:nvSpPr>
@@ -12145,7 +12145,7 @@
       </p:sp>
       <p:sp>
         <p:nvSpPr>
-          <p:cNvPr id="9" name="plan133|card|"/>
+          <p:cNvPr id="9" name="plan137|card|"/>
           <p:cNvSpPr txBox="1"/>
           <p:nvPr/>
         </p:nvSpPr>
@@ -12180,7 +12180,7 @@
       </p:sp>
       <p:sp>
         <p:nvSpPr>
-          <p:cNvPr id="10" name="plan133|caption|"/>
+          <p:cNvPr id="10" name="plan137|caption|"/>
           <p:cNvSpPr txBox="1"/>
           <p:nvPr/>
         </p:nvSpPr>
@@ -12231,7 +12231,7 @@
       </p:sp>
       <p:sp>
         <p:nvSpPr>
-          <p:cNvPr id="11" name="plan134|card|"/>
+          <p:cNvPr id="11" name="plan138|card|"/>
           <p:cNvSpPr/>
           <p:nvPr/>
         </p:nvSpPr>
@@ -12277,7 +12277,7 @@
       </p:sp>
       <p:sp>
         <p:nvSpPr>
-          <p:cNvPr id="12" name="plan134|card|"/>
+          <p:cNvPr id="12" name="plan138|card|"/>
           <p:cNvSpPr txBox="1"/>
           <p:nvPr/>
         </p:nvSpPr>
@@ -12312,7 +12312,7 @@
       </p:sp>
       <p:sp>
         <p:nvSpPr>
-          <p:cNvPr id="13" name="plan134|card|"/>
+          <p:cNvPr id="13" name="plan138|card|"/>
           <p:cNvSpPr txBox="1"/>
           <p:nvPr/>
         </p:nvSpPr>
@@ -12356,7 +12356,7 @@
       </p:sp>
       <p:sp>
         <p:nvSpPr>
-          <p:cNvPr id="14" name="plan134|caption|"/>
+          <p:cNvPr id="14" name="plan138|caption|"/>
           <p:cNvSpPr txBox="1"/>
           <p:nvPr/>
         </p:nvSpPr>
@@ -12391,7 +12391,7 @@
       </p:sp>
       <p:sp>
         <p:nvSpPr>
-          <p:cNvPr id="15" name="plan134|card|"/>
+          <p:cNvPr id="15" name="plan138|card|"/>
           <p:cNvSpPr txBox="1"/>
           <p:nvPr/>
         </p:nvSpPr>
@@ -12426,7 +12426,7 @@
       </p:sp>
       <p:sp>
         <p:nvSpPr>
-          <p:cNvPr id="16" name="plan134|card|"/>
+          <p:cNvPr id="16" name="plan138|card|"/>
           <p:cNvSpPr txBox="1"/>
           <p:nvPr/>
         </p:nvSpPr>
@@ -12461,7 +12461,7 @@
       </p:sp>
       <p:sp>
         <p:nvSpPr>
-          <p:cNvPr id="17" name="plan134|caption|"/>
+          <p:cNvPr id="17" name="plan138|caption|"/>
           <p:cNvSpPr txBox="1"/>
           <p:nvPr/>
         </p:nvSpPr>
@@ -12512,7 +12512,7 @@
       </p:sp>
       <p:sp>
         <p:nvSpPr>
-          <p:cNvPr id="18" name="plan135|card|"/>
+          <p:cNvPr id="18" name="plan139|card|"/>
           <p:cNvSpPr/>
           <p:nvPr/>
         </p:nvSpPr>
@@ -12558,7 +12558,7 @@
       </p:sp>
       <p:sp>
         <p:nvSpPr>
-          <p:cNvPr id="19" name="plan135|card|"/>
+          <p:cNvPr id="19" name="plan139|card|"/>
           <p:cNvSpPr txBox="1"/>
           <p:nvPr/>
         </p:nvSpPr>
@@ -12593,7 +12593,7 @@
       </p:sp>
       <p:sp>
         <p:nvSpPr>
-          <p:cNvPr id="20" name="plan135|card|"/>
+          <p:cNvPr id="20" name="plan139|card|"/>
           <p:cNvSpPr txBox="1"/>
           <p:nvPr/>
         </p:nvSpPr>
@@ -12637,7 +12637,7 @@
       </p:sp>
       <p:sp>
         <p:nvSpPr>
-          <p:cNvPr id="21" name="plan135|caption|"/>
+          <p:cNvPr id="21" name="plan139|caption|"/>
           <p:cNvSpPr txBox="1"/>
           <p:nvPr/>
         </p:nvSpPr>
@@ -12672,7 +12672,7 @@
       </p:sp>
       <p:sp>
         <p:nvSpPr>
-          <p:cNvPr id="22" name="plan135|card|"/>
+          <p:cNvPr id="22" name="plan139|card|"/>
           <p:cNvSpPr txBox="1"/>
           <p:nvPr/>
         </p:nvSpPr>
@@ -12707,7 +12707,7 @@
       </p:sp>
       <p:sp>
         <p:nvSpPr>
-          <p:cNvPr id="23" name="plan135|card|"/>
+          <p:cNvPr id="23" name="plan139|card|"/>
           <p:cNvSpPr txBox="1"/>
           <p:nvPr/>
         </p:nvSpPr>
@@ -12742,7 +12742,7 @@
       </p:sp>
       <p:sp>
         <p:nvSpPr>
-          <p:cNvPr id="24" name="plan135|caption|"/>
+          <p:cNvPr id="24" name="plan139|caption|"/>
           <p:cNvSpPr txBox="1"/>
           <p:nvPr/>
         </p:nvSpPr>
@@ -12793,7 +12793,7 @@
       </p:sp>
       <p:sp>
         <p:nvSpPr>
-          <p:cNvPr id="25" name="g136|caption|"/>
+          <p:cNvPr id="25" name="g140|caption|"/>
           <p:cNvSpPr txBox="1"/>
           <p:nvPr/>
         </p:nvSpPr>
@@ -12837,7 +12837,7 @@
                 </a:solidFill>
                 <a:latin typeface="Inter"/>
               </a:rPr>
-              <a:t>Founding Member: 30% off your first two monthly bills, South African sign-ups, while it lasts.</a:t>
+              <a:t>Founding Member: 30% off your first two monthly bills on every plan, Nano to Agency, until 31 December 2026.</a:t>
             </a:r>
           </a:p>
         </p:txBody>
